--- a/static/downloads/income-streams/SuperAdPro-4-Income-Streams-ZH.pptx
+++ b/static/downloads/income-streams/SuperAdPro-4-Income-Streams-ZH.pptx
@@ -506,7 +506,7 @@
           <a:p>
             <a:r>
               <a:rPr lang="en-US" dirty="0"/>
-              <a:t>4 Income Streams - SuperAdPro (中文)</a:t>
+              <a:t>4 Income Streams - 中文</a:t>
             </a:r>
             <a:endParaRPr lang="en-US" dirty="0"/>
           </a:p>
@@ -594,7 +594,7 @@
           <a:p>
             <a:r>
               <a:rPr lang="en-US" dirty="0"/>
-              <a:t>Membership Referrals - SuperAdPro (中文)</a:t>
+              <a:t>Membership Referrals - 中文</a:t>
             </a:r>
             <a:endParaRPr lang="en-US" dirty="0"/>
           </a:p>
@@ -682,7 +682,7 @@
           <a:p>
             <a:r>
               <a:rPr lang="en-US" dirty="0"/>
-              <a:t>Campaign Grid - SuperAdPro (中文)</a:t>
+              <a:t>Campaign Grid - 中文</a:t>
             </a:r>
             <a:endParaRPr lang="en-US" dirty="0"/>
           </a:p>
@@ -770,7 +770,7 @@
           <a:p>
             <a:r>
               <a:rPr lang="en-US" dirty="0"/>
-              <a:t>Credit Nexus - SuperAdPro (中文)</a:t>
+              <a:t>Credit Nexus - 中文</a:t>
             </a:r>
             <a:endParaRPr lang="en-US" dirty="0"/>
           </a:p>
@@ -858,7 +858,7 @@
           <a:p>
             <a:r>
               <a:rPr lang="en-US" dirty="0"/>
-              <a:t>Course Academy - SuperAdPro (中文)</a:t>
+              <a:t>Course Academy - 中文</a:t>
             </a:r>
             <a:endParaRPr lang="en-US" dirty="0"/>
           </a:p>

--- a/static/downloads/income-streams/SuperAdPro-4-Income-Streams-ZH.pptx
+++ b/static/downloads/income-streams/SuperAdPro-4-Income-Streams-ZH.pptx
@@ -2293,7 +2293,7 @@
                 <a:ea typeface="Arial" pitchFamily="34" charset="-122"/>
                 <a:cs typeface="Arial" pitchFamily="34" charset="-120"/>
               </a:rPr>
-              <a:t>最高 $103,976</a:t>
+              <a:t>理论最大值: $103,976*</a:t>
             </a:r>
             <a:endParaRPr lang="en-US" sz="850" dirty="0"/>
           </a:p>
@@ -2483,7 +2483,7 @@
                 <a:ea typeface="Arial" pitchFamily="34" charset="-122"/>
                 <a:cs typeface="Arial" pitchFamily="34" charset="-120"/>
               </a:rPr>
-              <a:t>无上限</a:t>
+              <a:t>可变</a:t>
             </a:r>
             <a:endParaRPr lang="en-US" sz="850" dirty="0"/>
           </a:p>
@@ -6709,7 +6709,7 @@
                 <a:ea typeface="Arial" pitchFamily="34" charset="-122"/>
                 <a:cs typeface="Arial" pitchFamily="34" charset="-120"/>
               </a:rPr>
-              <a:t>填满全部 64 位,获得奖金。网格重置 — 无限经常性收入。</a:t>
+              <a:t>填满全部 64 位,获得奖金。网格重置 — 当会员保持活跃时的经常性收入。</a:t>
             </a:r>
             <a:endParaRPr lang="en-US" sz="850" dirty="0"/>
           </a:p>
@@ -6775,7 +6775,7 @@
                 <a:ea typeface="Arial" pitchFamily="34" charset="-122"/>
                 <a:cs typeface="Arial" pitchFamily="34" charset="-120"/>
               </a:rPr>
-              <a:t>最高 $103,976</a:t>
+              <a:t>理论最大值: $103,976*</a:t>
             </a:r>
             <a:pPr algn="ctr" indent="0" marL="0">
               <a:buNone/>
@@ -13159,7 +13159,7 @@
                 <a:ea typeface="Arial" pitchFamily="34" charset="-122"/>
                 <a:cs typeface="Arial" pitchFamily="34" charset="-120"/>
               </a:rPr>
-              <a:t>无上限</a:t>
+              <a:t>可变</a:t>
             </a:r>
             <a:pPr algn="ctr" indent="0" marL="0">
               <a:buNone/>
